--- a/PEFT_Plant_Disease_Classification.pptx
+++ b/PEFT_Plant_Disease_Classification.pptx
@@ -3672,6 +3672,7 @@
               </a:defRPr>
             </a:pPr>
             <a:r>
+              <a:rPr dirty="0"/>
               <a:t>Plant diseases cause up to 40% of global crop losses annually. Early, accurate detection is critical for food security. Manual expert diagnosis is slow, expensive, and unavailable in rural areas.</a:t>
             </a:r>
           </a:p>
@@ -4664,6 +4665,7 @@
               </a:defRPr>
             </a:pPr>
             <a:r>
+              <a:rPr dirty="0"/>
               <a:t>Create a production-ready pipeline with web UI, interactive inference, checkpoint ranking, and a self-contained HTML dashboard for visualization.</a:t>
             </a:r>
           </a:p>
@@ -5035,7 +5037,7 @@
         <p:spPr>
           <a:xfrm>
             <a:off x="1005840" y="2743200"/>
-            <a:ext cx="10241280" cy="457200"/>
+            <a:ext cx="10241280" cy="492443"/>
           </a:xfrm>
           <a:prstGeom prst="rect">
             <a:avLst/>
@@ -5048,7 +5050,7 @@
           </a:bodyPr>
           <a:lstStyle/>
           <a:p>
-            <a:pPr algn="l">
+            <a:pPr>
               <a:defRPr sz="1300" b="0">
                 <a:solidFill>
                   <a:srgbClr val="BBBBCC"/>
@@ -5057,8 +5059,39 @@
               </a:defRPr>
             </a:pPr>
             <a:r>
-              <a:t>4-bit NF4 quantization + LoRA for LLMs. We adapt this to CNN Conv2d layers via bitsandbytes reshaping.</a:t>
-            </a:r>
+              <a:rPr dirty="0"/>
+              <a:t>4-bit NF4 quantization + </a:t>
+            </a:r>
+            <a:r>
+              <a:rPr dirty="0" err="1"/>
+              <a:t>LoRA</a:t>
+            </a:r>
+            <a:r>
+              <a:rPr dirty="0"/>
+              <a:t> for LLMs. We adapt this to CNN Conv2d layers via </a:t>
+            </a:r>
+            <a:r>
+              <a:rPr dirty="0" err="1"/>
+              <a:t>bitsandbytes</a:t>
+            </a:r>
+            <a:r>
+              <a:rPr dirty="0"/>
+              <a:t> reshaping.</a:t>
+            </a:r>
+            <a:r>
+              <a:rPr lang="en-US" dirty="0"/>
+              <a:t> We </a:t>
+            </a:r>
+            <a:r>
+              <a:rPr lang="en-US" sz="1300" dirty="0">
+                <a:solidFill>
+                  <a:srgbClr val="BBBBCC"/>
+                </a:solidFill>
+                <a:latin typeface="Calibri"/>
+              </a:rPr>
+              <a:t>dequantize back to 2D and reshape to 4D for every forward pass.</a:t>
+            </a:r>
+            <a:endParaRPr dirty="0"/>
           </a:p>
         </p:txBody>
       </p:sp>
@@ -5153,7 +5186,7 @@
         <p:spPr>
           <a:xfrm>
             <a:off x="1005840" y="3749040"/>
-            <a:ext cx="10241280" cy="457200"/>
+            <a:ext cx="10241280" cy="492443"/>
           </a:xfrm>
           <a:prstGeom prst="rect">
             <a:avLst/>
@@ -5166,7 +5199,7 @@
           </a:bodyPr>
           <a:lstStyle/>
           <a:p>
-            <a:pPr algn="l">
+            <a:pPr>
               <a:defRPr sz="1300" b="0">
                 <a:solidFill>
                   <a:srgbClr val="BBBBCC"/>
@@ -5175,8 +5208,67 @@
               </a:defRPr>
             </a:pPr>
             <a:r>
-              <a:t>Group-wise quantization balanced with grouped LoRA A. We implement Algorithm 1 faithfully for 1×1 convolutions.</a:t>
-            </a:r>
+              <a:rPr dirty="0"/>
+              <a:t>Group-wise quantization balanced with grouped </a:t>
+            </a:r>
+            <a:r>
+              <a:rPr dirty="0" err="1"/>
+              <a:t>LoRA</a:t>
+            </a:r>
+            <a:r>
+              <a:rPr dirty="0"/>
+              <a:t> A. We implement Algorithm 1 faithfully for 1×1 convolutions.</a:t>
+            </a:r>
+            <a:r>
+              <a:rPr lang="en-US" dirty="0"/>
+              <a:t> </a:t>
+            </a:r>
+            <a:r>
+              <a:rPr lang="en-US" sz="1300" dirty="0">
+                <a:solidFill>
+                  <a:srgbClr val="BBBBCC"/>
+                </a:solidFill>
+                <a:latin typeface="Calibri"/>
+              </a:rPr>
+              <a:t> For a 1×1 conv the input dim is </a:t>
+            </a:r>
+            <a:r>
+              <a:rPr lang="en-US" sz="1300" dirty="0" err="1">
+                <a:solidFill>
+                  <a:srgbClr val="BBBBCC"/>
+                </a:solidFill>
+                <a:latin typeface="Calibri"/>
+              </a:rPr>
+              <a:t>D_in</a:t>
+            </a:r>
+            <a:r>
+              <a:rPr lang="en-US" sz="1300" dirty="0">
+                <a:solidFill>
+                  <a:srgbClr val="BBBBCC"/>
+                </a:solidFill>
+                <a:latin typeface="Calibri"/>
+              </a:rPr>
+              <a:t> = </a:t>
+            </a:r>
+            <a:r>
+              <a:rPr lang="en-US" sz="1300" dirty="0" err="1">
+                <a:solidFill>
+                  <a:srgbClr val="BBBBCC"/>
+                </a:solidFill>
+                <a:latin typeface="Calibri"/>
+              </a:rPr>
+              <a:t>in·k·k</a:t>
+            </a:r>
+            <a:r>
+              <a:rPr lang="en-US" sz="1300" dirty="0">
+                <a:solidFill>
+                  <a:srgbClr val="BBBBCC"/>
+                </a:solidFill>
+                <a:latin typeface="Calibri"/>
+              </a:rPr>
+              <a:t>. QALoRAConv2d replaces nn.Conv2d directly.</a:t>
+            </a:r>
+            <a:endParaRPr dirty="0"/>
           </a:p>
         </p:txBody>
       </p:sp>
